--- a/documentos_teoricos/entregable2/solo_entregable2_presentacion.pptx
+++ b/documentos_teoricos/entregable2/solo_entregable2_presentacion.pptx
@@ -940,7 +940,7 @@
           <a:lstStyle/>
           <a:p>
             <a:r>
-              <a:t>Fabrizzio: Validamos el diseño con matrices de cobertura. Cada uno de los 22 requerimientos funcionales tiene pantalla, caso de uso, clase y tabla; los 19 no funcionales tienen una decisión de diseño verificable. Hicimos una evaluación heurística con las diez heurísticas de Nielsen y un recorrido de seis tareas, y definimos la prueba con tres titulares para la iteración 3. Devuelvo la palabra a Diego.</a:t>
+              <a:t>Fabrizzio: Validamos el diseño con matrices de cobertura. Cada uno de los 22 requerimientos funcionales tiene pantalla, caso de uso, clase y tabla; los 19 no funcionales tienen una decisión de diseño verificable. Hicimos una evaluación heurística con las diez heurísticas de Nielsen y un recorrido de seis tareas, y definimos la prueba con tres titulares para las semanas 11 y 12, en la iteración 4. Devuelvo la palabra a Diego.</a:t>
             </a:r>
           </a:p>
         </p:txBody>
@@ -1150,7 +1150,7 @@
           <a:lstStyle/>
           <a:p>
             <a:r>
-              <a:t>Diego: Cinco conclusiones. El problema es operativo y el proceso propuesto elimina sus tres puntos de error. El diseño cubre el 100 % del alcance. Todo vive en una sola base cifrada en el teléfono y el titular exporta sus datos cuando quiere. El registro toma tres toques y se validará con usuarios en la iteración 3. Y la solución mantiene 85 % de Java sin costo mensual de operación.</a:t>
+              <a:t>Diego: Cinco conclusiones. El problema es operativo y el proceso propuesto elimina sus tres puntos de error. El diseño cubre el 100 % del alcance. Todo vive en una sola base cifrada en el teléfono y el titular exporta sus datos cuando quiere. El registro toma tres toques y se validará con usuarios en las semanas 11 y 12, en la iteración 4. Y la solución mantiene 85 % de Java sin costo mensual de operación.</a:t>
             </a:r>
           </a:p>
         </p:txBody>
@@ -1360,7 +1360,7 @@
           <a:lstStyle/>
           <a:p>
             <a:r>
-              <a:t>Diego: El objetivo general es desarrollar Facturas S20, una app Android en Java que registre las facturas por foto con Gemma 4 ajustado y ejecutado en el teléfono, y que calcule el total del mes y la categoría del NRUS. Lo desglosamos en siete objetivos específicos, cada uno con un resultado medible: del modelado de procesos a la validación en un mes simulado. A la derecha, lo que queda fuera: la app calcula y prepara, pero la declaración se presenta por los canales de la SUNAT.</a:t>
+              <a:t>Diego: El objetivo general repite el título del proyecto: desarrollar una aplicación móvil con IA multimodal, Gemma 4, para mejorar la exactitud de la declaración mensual del NRUS en bodegas de San Juan de Lurigancho. Lo desglosamos en siete objetivos específicos directos, cada uno con su indicador de medición; los valores se miden y se reportan al final del proyecto, no en este avance. A la derecha, lo que queda fuera: la app calcula y prepara, pero la declaración se presenta por los canales de la SUNAT.</a:t>
             </a:r>
           </a:p>
         </p:txBody>
@@ -10005,7 +10005,7 @@
                 </a:solidFill>
                 <a:latin typeface="Calibri"/>
               </a:rPr>
-              <a:t>Metas de usabilidad (I3)</a:t>
+              <a:t>Metas de usabilidad (I4, sem. 11–12)</a:t>
             </a:r>
           </a:p>
         </p:txBody>
@@ -13966,7 +13966,7 @@
                 </a:solidFill>
                 <a:latin typeface="Calibri"/>
               </a:rPr>
-              <a:t>El registro de una factura toma tres toques desde el inicio; se validará con usuarios en la iteración I3.</a:t>
+              <a:t>El registro de una factura toma tres toques desde el inicio; se validará con usuarios en las semanas 11–12 (I4).</a:t>
             </a:r>
           </a:p>
         </p:txBody>
@@ -17038,7 +17038,7 @@
                 </a:solidFill>
                 <a:latin typeface="Calibri"/>
               </a:rPr>
-              <a:t>app Android nativa en Java que registra las facturas de compra por fotografía con Gemma 4 E2B ajustado y ejecutado en el teléfono, sin conexión, y calcula el total mensual y la categoría del NRUS.</a:t>
+              <a:t>desarrollar una aplicación móvil con IA multimodal (Gemma 4) para mejorar la exactitud de la declaración mensual del NRUS en bodegas de S.J.L.</a:t>
             </a:r>
           </a:p>
         </p:txBody>
@@ -17126,7 +17126,7 @@
                           </a:solidFill>
                           <a:latin typeface="Calibri"/>
                         </a:rPr>
-                        <a:t>Resultado esperado</a:t>
+                        <a:t>Indicador de medición</a:t>
                       </a:r>
                     </a:p>
                   </a:txBody>
@@ -17173,7 +17173,7 @@
                           </a:solidFill>
                           <a:latin typeface="Calibri"/>
                         </a:rPr>
-                        <a:t>Modelar el proceso actual y el propuesto</a:t>
+                        <a:t>Modelar con BPMN el proceso actual y el propuesto</a:t>
                       </a:r>
                     </a:p>
                   </a:txBody>
@@ -17196,7 +17196,7 @@
                           </a:solidFill>
                           <a:latin typeface="Calibri"/>
                         </a:rPr>
-                        <a:t>AS-IS y TO-BE con puntos de error</a:t>
+                        <a:t>Puntos de error eliminados o automatizados</a:t>
                       </a:r>
                     </a:p>
                   </a:txBody>
@@ -17243,7 +17243,7 @@
                           </a:solidFill>
                           <a:latin typeface="Calibri"/>
                         </a:rPr>
-                        <a:t>Conjunto de facturas peruanas etiquetadas</a:t>
+                        <a:t>Construir el conjunto de facturas etiquetadas</a:t>
                       </a:r>
                     </a:p>
                   </a:txBody>
@@ -17266,7 +17266,7 @@
                           </a:solidFill>
                           <a:latin typeface="Calibri"/>
                         </a:rPr>
-                        <a:t>Entrenamiento, validación y prueba</a:t>
+                        <a:t>Facturas y formatos de emisor etiquetados</a:t>
                       </a:r>
                     </a:p>
                   </a:txBody>
@@ -17313,7 +17313,7 @@
                           </a:solidFill>
                           <a:latin typeface="Calibri"/>
                         </a:rPr>
-                        <a:t>Ajuste fino de Gemma 4 E2B y conversión a .litertlm</a:t>
+                        <a:t>Ajustar y convertir Gemma 4 E2B al teléfono</a:t>
                       </a:r>
                     </a:p>
                   </a:txBody>
@@ -17336,7 +17336,7 @@
                           </a:solidFill>
                           <a:latin typeface="Calibri"/>
                         </a:rPr>
-                        <a:t>Mejor que el modelo base tras convertir</a:t>
+                        <a:t>Exactitud por campo frente al modelo base</a:t>
                       </a:r>
                     </a:p>
                   </a:txBody>
@@ -17383,7 +17383,7 @@
                           </a:solidFill>
                           <a:latin typeface="Calibri"/>
                         </a:rPr>
-                        <a:t>Motor de reglas del NRUS</a:t>
+                        <a:t>Implementar el motor de reglas del NRUS</a:t>
                       </a:r>
                     </a:p>
                   </a:txBody>
@@ -17406,7 +17406,7 @@
                           </a:solidFill>
                           <a:latin typeface="Calibri"/>
                         </a:rPr>
-                        <a:t>Verificado con casos de la norma</a:t>
+                        <a:t>Casos de prueba de la norma resueltos</a:t>
                       </a:r>
                     </a:p>
                   </a:txBody>
@@ -17453,7 +17453,7 @@
                           </a:solidFill>
                           <a:latin typeface="Calibri"/>
                         </a:rPr>
-                        <a:t>App Android en Java con LiteRT-LM</a:t>
+                        <a:t>Desarrollar la app Android en Java sin conexión</a:t>
                       </a:r>
                     </a:p>
                   </a:txBody>
@@ -17476,7 +17476,7 @@
                           </a:solidFill>
                           <a:latin typeface="Calibri"/>
                         </a:rPr>
-                        <a:t>Sin conexión, ≥ 50 % de Java</a:t>
+                        <a:t>Tiempo de lectura y % de código Java</a:t>
                       </a:r>
                     </a:p>
                   </a:txBody>
@@ -17523,7 +17523,7 @@
                           </a:solidFill>
                           <a:latin typeface="Calibri"/>
                         </a:rPr>
-                        <a:t>Exportación a CSV, imágenes y PDF</a:t>
+                        <a:t>Exportar los datos a CSV y PDF</a:t>
                       </a:r>
                     </a:p>
                   </a:txBody>
@@ -17546,7 +17546,7 @@
                           </a:solidFill>
                           <a:latin typeface="Calibri"/>
                         </a:rPr>
-                        <a:t>Cero envíos automáticos de datos</a:t>
+                        <a:t>Archivos abiertos en PC; envíos no autorizados</a:t>
                       </a:r>
                     </a:p>
                   </a:txBody>
@@ -17593,7 +17593,7 @@
                           </a:solidFill>
                           <a:latin typeface="Calibri"/>
                         </a:rPr>
-                        <a:t>Validar en un mes simulado</a:t>
+                        <a:t>Evaluar la declaración en un mes simulado</a:t>
                       </a:r>
                     </a:p>
                   </a:txBody>
@@ -17616,7 +17616,7 @@
                           </a:solidFill>
                           <a:latin typeface="Calibri"/>
                         </a:rPr>
-                        <a:t>≥ 90 % por campo · ≤ 20 s · &lt; 2 % en el total</a:t>
+                        <a:t>Diferencia con el cálculo manual; categoría</a:t>
                       </a:r>
                     </a:p>
                   </a:txBody>
